--- a/slides/Intro-Good-Code-Good-Vibes.pptx
+++ b/slides/Intro-Good-Code-Good-Vibes.pptx
@@ -8,7 +8,7 @@
     <p:sldId id="256" r:id="rId7"/>
     <p:sldId id="257" r:id="rId8"/>
     <p:sldId id="258" r:id="rId9"/>
-    <p:sldId id="259" r:id="rId10"/>
+    <p:sldId id="259" r:id="rId11"/>
     <p:sldId id="260" r:id="rId12"/>
     <p:sldId id="261" r:id="rId13"/>
     <p:sldId id="262" r:id="rId14"/>
@@ -510,7 +510,7 @@
           <a:lstStyle/>
           <a:p>
             <a:r>
-              <a:t>Setup mirrors the current 7_13 activity. Jonathan may have tweaked the live version — reconcile with his slide if so.</a:t>
+              <a:t>Emphasize the deadline: everything is due the next morning, and the site must actually be deployed — we'll pull up a handful of live pages the next day and review them with the whole class.</a:t>
             </a:r>
           </a:p>
         </p:txBody>
@@ -580,7 +580,7 @@
           <a:lstStyle/>
           <a:p>
             <a:r>
-              <a:t>Links go to Hauke's and Jonathan's hosted, vibe-coded 'About Me' pages (the 7/13 example). Real sites: haukesandhaus.de · jonathansegal.io.</a:t>
+              <a:t>Setup mirrors the current 7_13 activity. Jonathan may have tweaked the live version — reconcile with his slide if so.</a:t>
             </a:r>
           </a:p>
         </p:txBody>
@@ -650,7 +650,7 @@
           <a:lstStyle/>
           <a:p>
             <a:r>
-              <a:t>Colophon link deep-links to the disclosure on the showcase site (lite notepad).</a:t>
+              <a:t>Links go to Hauke's and Jonathan's hosted, vibe-coded 'About Me' pages (the 7/13 example). Real sites: haukesandhaus.de · jonathansegal.io.</a:t>
             </a:r>
           </a:p>
         </p:txBody>
@@ -676,6 +676,76 @@
 </file>
 
 <file path=ppt/notesSlides/notesSlide4.xml><?xml version="1.0" encoding="utf-8"?>
+<p:notes xmlns:a="http://schemas.openxmlformats.org/drawingml/2006/main" xmlns:p="http://schemas.openxmlformats.org/presentationml/2006/main" xmlns:r="http://schemas.openxmlformats.org/officeDocument/2006/relationships">
+  <p:cSld>
+    <p:spTree>
+      <p:nvGrpSpPr>
+        <p:cNvPr id="1" name=""/>
+        <p:cNvGrpSpPr/>
+        <p:nvPr/>
+      </p:nvGrpSpPr>
+      <p:grpSpPr>
+        <a:xfrm>
+          <a:off x="0" y="0"/>
+          <a:ext cx="0" cy="0"/>
+          <a:chOff x="0" y="0"/>
+          <a:chExt cx="0" cy="0"/>
+        </a:xfrm>
+      </p:grpSpPr>
+      <p:sp>
+        <p:nvSpPr>
+          <p:cNvPr id="2" name="Slide Image Placeholder 1"/>
+          <p:cNvSpPr>
+            <a:spLocks noGrp="1"/>
+          </p:cNvSpPr>
+          <p:nvPr>
+            <p:ph type="sldImg" idx="2"/>
+          </p:nvPr>
+        </p:nvSpPr>
+        <p:spPr/>
+      </p:sp>
+      <p:sp>
+        <p:nvSpPr>
+          <p:cNvPr id="3" name="Notes Placeholder 2"/>
+          <p:cNvSpPr>
+            <a:spLocks noGrp="1"/>
+          </p:cNvSpPr>
+          <p:nvPr>
+            <p:ph type="body" idx="3" sz="quarter"/>
+          </p:nvPr>
+        </p:nvSpPr>
+        <p:spPr/>
+        <p:txBody>
+          <a:bodyPr/>
+          <a:lstStyle/>
+          <a:p>
+            <a:r>
+              <a:t>Colophon link deep-links to the disclosure on the showcase site (lite notepad).</a:t>
+            </a:r>
+          </a:p>
+        </p:txBody>
+      </p:sp>
+      <p:sp>
+        <p:nvSpPr>
+          <p:cNvPr id="4" name="Slide Number Placeholder 3"/>
+          <p:cNvSpPr>
+            <a:spLocks noGrp="1"/>
+          </p:cNvSpPr>
+          <p:nvPr>
+            <p:ph type="sldNum" idx="5" sz="quarter"/>
+          </p:nvPr>
+        </p:nvSpPr>
+        <p:spPr/>
+      </p:sp>
+    </p:spTree>
+  </p:cSld>
+  <p:clrMapOvr>
+    <a:masterClrMapping/>
+  </p:clrMapOvr>
+</p:notes>
+</file>
+
+<file path=ppt/notesSlides/notesSlide5.xml><?xml version="1.0" encoding="utf-8"?>
 <p:notes xmlns:a="http://schemas.openxmlformats.org/drawingml/2006/main" xmlns:p="http://schemas.openxmlformats.org/presentationml/2006/main" xmlns:r="http://schemas.openxmlformats.org/officeDocument/2006/relationships">
   <p:cSld>
     <p:spTree>
@@ -4980,6 +5050,56 @@
                 <a:latin typeface="Arial"/>
               </a:rPr>
               <a:t>Repo-only: your GitHub repo is your submission, and it deploys to a live page.</a:t>
+            </a:r>
+          </a:p>
+          <a:p>
+            <a:pPr algn="l">
+              <a:lnSpc>
+                <a:spcPct val="112000"/>
+              </a:lnSpc>
+            </a:pPr>
+            <a:r>
+              <a:rPr sz="2000" b="1">
+                <a:solidFill>
+                  <a:srgbClr val="00FF41"/>
+                </a:solidFill>
+                <a:latin typeface="Arial"/>
+              </a:rPr>
+              <a:t>•  </a:t>
+            </a:r>
+            <a:r>
+              <a:rPr sz="2000" b="0">
+                <a:solidFill>
+                  <a:srgbClr val="F5F7FA"/>
+                </a:solidFill>
+                <a:latin typeface="Arial"/>
+              </a:rPr>
+              <a:t>Deadline: activities and projects are due the next morning — pushed and deployed live.</a:t>
+            </a:r>
+          </a:p>
+          <a:p>
+            <a:pPr algn="l">
+              <a:lnSpc>
+                <a:spcPct val="112000"/>
+              </a:lnSpc>
+            </a:pPr>
+            <a:r>
+              <a:rPr sz="2000" b="1">
+                <a:solidFill>
+                  <a:srgbClr val="00FF41"/>
+                </a:solidFill>
+                <a:latin typeface="Arial"/>
+              </a:rPr>
+              <a:t>•  </a:t>
+            </a:r>
+            <a:r>
+              <a:rPr sz="2000" b="0">
+                <a:solidFill>
+                  <a:srgbClr val="F5F7FA"/>
+                </a:solidFill>
+                <a:latin typeface="Arial"/>
+              </a:rPr>
+              <a:t>Next day we open a few of your deployed sites and walk through them together in class.</a:t>
             </a:r>
           </a:p>
           <a:p>
